--- a/thesis/答辩/论文汇报PPT_模板风格版.pptx
+++ b/thesis/答辩/论文汇报PPT_模板风格版.pptx
@@ -3759,7 +3759,7 @@
                 </a:solidFill>
                 <a:latin typeface="Noto Sans CJK SC"/>
               </a:rPr>
-              <a:t>人工平滑只在正确答案周围分配固定噪声，信息结构单一</a:t>
+              <a:t>人工平滑只是加固定噪声</a:t>
             </a:r>
           </a:p>
           <a:p>
@@ -3770,7 +3770,7 @@
                 </a:solidFill>
                 <a:latin typeface="Noto Sans CJK SC"/>
               </a:rPr>
-              <a:t>无法反映“最容易混淆的错误项”与“边界距离”</a:t>
+              <a:t>看不到最容易混淆的错误项和边界距离</a:t>
             </a:r>
           </a:p>
           <a:p>
@@ -3781,7 +3781,7 @@
                 </a:solidFill>
                 <a:latin typeface="Noto Sans CJK SC"/>
               </a:rPr>
-              <a:t>因此在任务层面只提供了有限的软监督增益</a:t>
+              <a:t>因此只能提供有限的软监督增益</a:t>
             </a:r>
           </a:p>
         </p:txBody>
@@ -3846,7 +3846,7 @@
                 </a:solidFill>
                 <a:latin typeface="Noto Sans CJK SC"/>
               </a:rPr>
-              <a:t>Fisher-Rao 与 α-散度分析显示：真实 logprobs 更接近连续概率流形</a:t>
+              <a:t>Fisher-Rao 与 α-散度都指向同一结论</a:t>
             </a:r>
           </a:p>
           <a:p>
@@ -3857,7 +3857,7 @@
                 </a:solidFill>
                 <a:latin typeface="Noto Sans CJK SC"/>
               </a:rPr>
-              <a:t>真实标签的体积密度约为人工平滑标签的 2500 倍</a:t>
+              <a:t>真实 logprobs 更接近连续概率流形</a:t>
             </a:r>
           </a:p>
           <a:p>
@@ -3868,7 +3868,7 @@
                 </a:solidFill>
                 <a:latin typeface="Noto Sans CJK SC"/>
               </a:rPr>
-              <a:t>这解释了为何真实 logprobs 教师往往蒸馏效果更稳定</a:t>
+              <a:t>体积密度约为人工平滑标签的 2500 倍</a:t>
             </a:r>
           </a:p>
         </p:txBody>
@@ -3922,7 +3922,7 @@
                 </a:solidFill>
                 <a:latin typeface="Noto Sans CJK SC"/>
               </a:rPr>
-              <a:t>结论：决定蒸馏效果的不只是“答对没有”，而是教师分布中是否保留了高价值的连续结构信息。</a:t>
+              <a:t>决定蒸馏效果的，不只是教师有没有答对，更在于它有没有保留高价值的连续结构信息。</a:t>
             </a:r>
           </a:p>
         </p:txBody>
@@ -4231,7 +4231,7 @@
                 </a:solidFill>
                 <a:latin typeface="Noto Sans CJK SC"/>
               </a:rPr>
-              <a:t>仓库中已实现统一训练、评估、Web 推理与 Quiz 交互入口</a:t>
+              <a:t>仓库已提供统一训练、评估和 Web/Quiz 入口</a:t>
             </a:r>
           </a:p>
           <a:p>
@@ -4242,7 +4242,7 @@
                 </a:solidFill>
                 <a:latin typeface="Noto Sans CJK SC"/>
               </a:rPr>
-              <a:t>7B/14B 学生模型可以在普通 GPU 条件下完成部署演示</a:t>
+              <a:t>7B/14B 学生模型可完成部署演示</a:t>
             </a:r>
           </a:p>
           <a:p>
@@ -4253,7 +4253,7 @@
                 </a:solidFill>
                 <a:latin typeface="Noto Sans CJK SC"/>
               </a:rPr>
-              <a:t>适合患者教育、教学演示、标准化考试训练等轻量场景</a:t>
+              <a:t>更适合教学演示、考试训练等轻量场景</a:t>
             </a:r>
           </a:p>
           <a:p>
@@ -4264,7 +4264,7 @@
                 </a:solidFill>
                 <a:latin typeface="Noto Sans CJK SC"/>
               </a:rPr>
-              <a:t>方法本身也可迁移到其他标准化多选知识评测任务</a:t>
+              <a:t>方法也能迁移到其他标准化多选任务</a:t>
             </a:r>
           </a:p>
         </p:txBody>
@@ -4329,7 +4329,7 @@
                 </a:solidFill>
                 <a:latin typeface="Noto Sans CJK SC"/>
               </a:rPr>
-              <a:t>不是把大模型原样搬到端侧，而是围绕任务结构重构蒸馏目标</a:t>
+              <a:t>重点不是把大模型原样搬到端侧</a:t>
             </a:r>
           </a:p>
           <a:p>
@@ -4340,7 +4340,7 @@
                 </a:solidFill>
                 <a:latin typeface="Noto Sans CJK SC"/>
               </a:rPr>
-              <a:t>把“能答题”转化为“能低成本稳定交付”</a:t>
+              <a:t>而是把“能答题”做成“能低成本交付”</a:t>
             </a:r>
           </a:p>
           <a:p>
@@ -4351,7 +4351,7 @@
                 </a:solidFill>
                 <a:latin typeface="Noto Sans CJK SC"/>
               </a:rPr>
-              <a:t>为医疗大模型轻量化提供了可复现、可解释的实验范式</a:t>
+              <a:t>为医疗大模型轻量化提供可复现范式</a:t>
             </a:r>
           </a:p>
         </p:txBody>
@@ -4671,7 +4671,7 @@
                 </a:solidFill>
                 <a:latin typeface="Noto Sans CJK SC"/>
               </a:rPr>
-              <a:t>教师谱系还不够密集，倒 U 型规律仍需更细粒度验证</a:t>
+              <a:t>教师谱系还不够密集，倒 U 型仍需更细验证</a:t>
             </a:r>
           </a:p>
           <a:p>
@@ -4682,7 +4682,7 @@
                 </a:solidFill>
                 <a:latin typeface="Noto Sans CJK SC"/>
               </a:rPr>
-              <a:t>评估指标以准确率为主，缺少人工质量评审与临床专家反馈</a:t>
+              <a:t>评估以准确率为主，缺少人工和专家反馈</a:t>
             </a:r>
           </a:p>
           <a:p>
@@ -4758,7 +4758,7 @@
                 </a:solidFill>
                 <a:latin typeface="Noto Sans CJK SC"/>
               </a:rPr>
-              <a:t>扩大数据与多种子验证，进一步提高结论的统计置信度</a:t>
+              <a:t>扩大数据与多种子验证，提高统计可信度</a:t>
             </a:r>
           </a:p>
           <a:p>
@@ -4769,7 +4769,7 @@
                 </a:solidFill>
                 <a:latin typeface="Noto Sans CJK SC"/>
               </a:rPr>
-              <a:t>研究教师路由、自适应 α-散度与动态样本选择策略</a:t>
+              <a:t>研究教师路由、自适应 α-散度和动态样本选择</a:t>
             </a:r>
           </a:p>
           <a:p>
@@ -4780,7 +4780,7 @@
                 </a:solidFill>
                 <a:latin typeface="Noto Sans CJK SC"/>
               </a:rPr>
-              <a:t>从选择题扩展到开放医疗问答、多模态与真实交互任务</a:t>
+              <a:t>从选择题扩展到开放问答、多模态和真实交互</a:t>
             </a:r>
           </a:p>
           <a:p>
@@ -4791,7 +4791,7 @@
                 </a:solidFill>
                 <a:latin typeface="Noto Sans CJK SC"/>
               </a:rPr>
-              <a:t>继续推进端侧部署与真实用户反馈闭环</a:t>
+              <a:t>继续推进端侧部署与真实反馈闭环</a:t>
             </a:r>
           </a:p>
         </p:txBody>
@@ -5054,7 +5054,7 @@
                 </a:solidFill>
                 <a:latin typeface="Noto Sans CJK SC"/>
               </a:rPr>
-              <a:t>本文证明：当蒸馏目标与任务决策结构对齐时，小模型不仅能以更低成本部署，还有机会获得超过教师的任务表现。</a:t>
+              <a:t>本文说明：当蒸馏目标和任务决策结构对齐时，小模型不仅更容易部署，也有机会超过教师。</a:t>
             </a:r>
           </a:p>
           <a:p>
@@ -5317,7 +5317,7 @@
                 </a:solidFill>
                 <a:latin typeface="Noto Sans CJK SC"/>
               </a:rPr>
-              <a:t>1. 研究背景与问题定义</a:t>
+              <a:t>1. 研究背景与核心问题</a:t>
             </a:r>
           </a:p>
           <a:p>
@@ -5336,7 +5336,7 @@
                 </a:solidFill>
                 <a:latin typeface="Noto Sans CJK SC"/>
               </a:rPr>
-              <a:t>2. 研究目标、数据与实验范围</a:t>
+              <a:t>2. 数据、目标与实验范围</a:t>
             </a:r>
           </a:p>
           <a:p>
@@ -5355,7 +5355,7 @@
                 </a:solidFill>
                 <a:latin typeface="Noto Sans CJK SC"/>
               </a:rPr>
-              <a:t>3. 核心方法：Choice-Head 两阶段蒸馏</a:t>
+              <a:t>3. Choice-Head 蒸馏方法</a:t>
             </a:r>
           </a:p>
           <a:p>
@@ -5412,7 +5412,7 @@
                 </a:solidFill>
                 <a:latin typeface="Noto Sans CJK SC"/>
               </a:rPr>
-              <a:t>6. 关键发现与理论解释</a:t>
+              <a:t>6. 关键发现与解释</a:t>
             </a:r>
           </a:p>
           <a:p>
@@ -5450,7 +5450,7 @@
                 </a:solidFill>
                 <a:latin typeface="Noto Sans CJK SC"/>
               </a:rPr>
-              <a:t>8. 结论与答辩总结</a:t>
+              <a:t>8. 结论</a:t>
             </a:r>
           </a:p>
         </p:txBody>
@@ -5748,7 +5748,7 @@
                 </a:solidFill>
                 <a:latin typeface="Noto Sans CJK SC"/>
               </a:rPr>
-              <a:t>核心问题：能否通过知识蒸馏，将大型教师模型的答题能力迁移到轻量级学生模型（7B~14B），在保持可部署性的同时最大化准确率？</a:t>
+              <a:t>核心问题：能否把大模型的牙科答题能力迁移到 7B/14B 学生模型，同时兼顾准确率和部署成本？</a:t>
             </a:r>
           </a:p>
         </p:txBody>
@@ -5825,7 +5825,7 @@
                 </a:solidFill>
                 <a:latin typeface="Noto Sans CJK SC"/>
               </a:rPr>
-              <a:t>牙科知识服务需要即时、低门槛、可解释的辅助能力</a:t>
+              <a:t>需要的是低成本、可部署的牙科答题能力</a:t>
             </a:r>
           </a:p>
           <a:p>
@@ -5844,7 +5844,7 @@
                 </a:solidFill>
                 <a:latin typeface="Noto Sans CJK SC"/>
               </a:rPr>
-              <a:t>商业级教师模型准确率高，但显存、算力和调用成本高</a:t>
+              <a:t>大模型效果好，但推理和部署代价高</a:t>
             </a:r>
           </a:p>
           <a:p>
@@ -5863,7 +5863,7 @@
                 </a:solidFill>
                 <a:latin typeface="Noto Sans CJK SC"/>
               </a:rPr>
-              <a:t>传统全词表蒸馏对五选一任务存在明显冗余</a:t>
+              <a:t>传统全词表蒸馏对五选一任务有明显冗余</a:t>
             </a:r>
           </a:p>
           <a:p>
@@ -5882,7 +5882,7 @@
                 </a:solidFill>
                 <a:latin typeface="Noto Sans CJK SC"/>
               </a:rPr>
-              <a:t>研究目标不是做更大模型，而是把高性能能力做成可部署系统</a:t>
+              <a:t>因此本文重写蒸馏目标，而不是继续堆大模型</a:t>
             </a:r>
           </a:p>
         </p:txBody>
@@ -6535,7 +6535,7 @@
                 </a:solidFill>
                 <a:latin typeface="Noto Sans CJK SC"/>
               </a:rPr>
-              <a:t>小规模实验：672/74/83（train/val/test）牙科固定划分</a:t>
+              <a:t>小规模：672/74/83 牙科固定划分</a:t>
             </a:r>
           </a:p>
           <a:p>
@@ -6546,7 +6546,7 @@
                 </a:solidFill>
                 <a:latin typeface="Noto Sans CJK SC"/>
               </a:rPr>
-              <a:t>大规模验证：4608/991/991 全量重分割 + 125 题牙科子集</a:t>
+              <a:t>大规模：4608/991/991 全量重分割 + 125 题牙科子集</a:t>
             </a:r>
           </a:p>
           <a:p>
@@ -6557,7 +6557,7 @@
                 </a:solidFill>
                 <a:latin typeface="Noto Sans CJK SC"/>
               </a:rPr>
-              <a:t>教师：DeepSeek-V3、Doubao、Llama-3.3-70B、Qwen2.5-32B</a:t>
+              <a:t>教师覆盖 DeepSeek-V3、Doubao、Llama-70B、Qwen2.5-32B</a:t>
             </a:r>
           </a:p>
           <a:p>
@@ -6633,7 +6633,7 @@
                 </a:solidFill>
                 <a:latin typeface="Noto Sans CJK SC"/>
               </a:rPr>
-              <a:t>学生：Qwen2.5-7B / 14B，覆盖 7B 到 14B 容量段</a:t>
+              <a:t>学生：Qwen2.5-7B / 14B</a:t>
             </a:r>
           </a:p>
           <a:p>
@@ -6644,7 +6644,7 @@
                 </a:solidFill>
                 <a:latin typeface="Noto Sans CJK SC"/>
               </a:rPr>
-              <a:t>本地教师：Qwen2.5-32B（32B）、Llama-3.3-70B（70B）</a:t>
+              <a:t>本地教师：Qwen2.5-32B、Llama-3.3-70B</a:t>
             </a:r>
           </a:p>
           <a:p>
@@ -7000,7 +7000,7 @@
                 </a:solidFill>
                 <a:latin typeface="Noto Sans CJK SC"/>
               </a:rPr>
-              <a:t>显存与计算代价高</a:t>
+              <a:t>代价高</a:t>
             </a:r>
           </a:p>
           <a:p>
@@ -7016,7 +7016,7 @@
                 </a:solidFill>
                 <a:latin typeface="Noto Sans CJK SC"/>
               </a:rPr>
-              <a:t>API 教师难以支持</a:t>
+              <a:t>黑盒教师难支持</a:t>
             </a:r>
           </a:p>
         </p:txBody>
@@ -7090,7 +7090,7 @@
                 </a:solidFill>
                 <a:latin typeface="Noto Sans CJK SC"/>
               </a:rPr>
-              <a:t>只蒸馏 A/B/C/D/E</a:t>
+              <a:t>只看 A/B/C/D/E</a:t>
             </a:r>
           </a:p>
           <a:p>
@@ -7106,7 +7106,7 @@
                 </a:solidFill>
                 <a:latin typeface="Noto Sans CJK SC"/>
               </a:rPr>
-              <a:t>监督维度压缩到 5 维</a:t>
+              <a:t>监督降到 5 维</a:t>
             </a:r>
           </a:p>
           <a:p>
@@ -7122,7 +7122,7 @@
                 </a:solidFill>
                 <a:latin typeface="Noto Sans CJK SC"/>
               </a:rPr>
-              <a:t>天然兼容黑盒教师</a:t>
+              <a:t>兼容 API 教师</a:t>
             </a:r>
           </a:p>
         </p:txBody>
@@ -7212,7 +7212,7 @@
                 </a:solidFill>
                 <a:latin typeface="Noto Sans CJK SC"/>
               </a:rPr>
-              <a:t>1 epoch，α=0.35</a:t>
+              <a:t>先学教师偏好</a:t>
             </a:r>
           </a:p>
           <a:p>
@@ -7228,7 +7228,7 @@
                 </a:solidFill>
                 <a:latin typeface="Noto Sans CJK SC"/>
               </a:rPr>
-              <a:t>先学教师偏好结构</a:t>
+              <a:t>1 epoch</a:t>
             </a:r>
           </a:p>
         </p:txBody>
@@ -7318,7 +7318,7 @@
                 </a:solidFill>
                 <a:latin typeface="Noto Sans CJK SC"/>
               </a:rPr>
-              <a:t>2–5 epochs</a:t>
+              <a:t>再用标准答案校准</a:t>
             </a:r>
           </a:p>
           <a:p>
@@ -7334,7 +7334,7 @@
                 </a:solidFill>
                 <a:latin typeface="Noto Sans CJK SC"/>
               </a:rPr>
-              <a:t>用标准答案纠正教师误差</a:t>
+              <a:t>2–5 epochs</a:t>
             </a:r>
           </a:p>
         </p:txBody>
@@ -7369,7 +7369,7 @@
                 </a:solidFill>
                 <a:latin typeface="Noto Sans CJK SC"/>
               </a:rPr>
-              <a:t>关键设计思想</a:t>
+              <a:t>方法直觉</a:t>
             </a:r>
           </a:p>
         </p:txBody>
@@ -7434,7 +7434,7 @@
                 </a:solidFill>
                 <a:latin typeface="Noto Sans CJK SC"/>
               </a:rPr>
-              <a:t>仅提取 A/B/C/D/E 五个选项上的概率分布</a:t>
+              <a:t>只蒸馏五个选项间的相对偏好</a:t>
             </a:r>
           </a:p>
           <a:p>
@@ -7456,7 +7456,7 @@
                 </a:solidFill>
                 <a:latin typeface="Noto Sans CJK SC"/>
               </a:rPr>
-              <a:t>典型显存约 22GB，可使用 API-only 教师</a:t>
+              <a:t>显存更低，也能用 API-only 教师</a:t>
             </a:r>
           </a:p>
         </p:txBody>
@@ -7532,7 +7532,7 @@
                 </a:solidFill>
                 <a:latin typeface="Noto Sans CJK SC"/>
               </a:rPr>
-              <a:t>用标准答案对教师错误进行校准</a:t>
+              <a:t>用 GT 校正教师误差</a:t>
             </a:r>
           </a:p>
           <a:p>
@@ -7543,7 +7543,7 @@
                 </a:solidFill>
                 <a:latin typeface="Noto Sans CJK SC"/>
               </a:rPr>
-              <a:t>对弱学生更稳定，对 14B 强学生不一定持续增益</a:t>
+              <a:t>对 7B 更稳，对 14B 不一定继续增益</a:t>
             </a:r>
           </a:p>
         </p:txBody>
@@ -7861,7 +7861,7 @@
                 </a:solidFill>
                 <a:latin typeface="Noto Sans CJK SC"/>
               </a:rPr>
-              <a:t>GT SFT 基线</a:t>
+              <a:t>GT SFT</a:t>
             </a:r>
           </a:p>
           <a:p>
@@ -7893,7 +7893,7 @@
                 </a:solidFill>
                 <a:latin typeface="Noto Sans CJK SC"/>
               </a:rPr>
-              <a:t>明确学生起点</a:t>
+              <a:t>先定起点</a:t>
             </a:r>
           </a:p>
         </p:txBody>
@@ -7999,7 +7999,7 @@
                 </a:solidFill>
                 <a:latin typeface="Noto Sans CJK SC"/>
               </a:rPr>
-              <a:t>比较教师形态与参数规模</a:t>
+              <a:t>比较监督形式</a:t>
             </a:r>
           </a:p>
         </p:txBody>
@@ -8179,7 +8179,7 @@
                 </a:solidFill>
                 <a:latin typeface="Noto Sans CJK SC"/>
               </a:rPr>
-              <a:t>CoT 蒸馏</a:t>
+              <a:t>CoT</a:t>
             </a:r>
           </a:p>
           <a:p>
@@ -8301,7 +8301,7 @@
                 </a:solidFill>
                 <a:latin typeface="Noto Sans CJK SC"/>
               </a:rPr>
-              <a:t>跨架构蒸馏</a:t>
+              <a:t>跨架构</a:t>
             </a:r>
           </a:p>
           <a:p>
@@ -8382,7 +8382,7 @@
                 </a:solidFill>
                 <a:latin typeface="Noto Sans CJK SC"/>
               </a:rPr>
-              <a:t>从单教师到多教师、从 7B 到 14B、从 83 题到 991 题逐层推进</a:t>
+              <a:t>从单教师到多教师、从 7B 到 14B 逐层推进</a:t>
             </a:r>
           </a:p>
           <a:p>
@@ -8393,7 +8393,7 @@
                 </a:solidFill>
                 <a:latin typeface="Noto Sans CJK SC"/>
               </a:rPr>
-              <a:t>包含正例、负例与失败实验，不只保留最优结果</a:t>
+              <a:t>同时保留正例、负例和失败实验</a:t>
             </a:r>
           </a:p>
           <a:p>
@@ -8404,7 +8404,7 @@
                 </a:solidFill>
                 <a:latin typeface="Noto Sans CJK SC"/>
               </a:rPr>
-              <a:t>所有模块保留统一运行脚本，强调可复现性</a:t>
+              <a:t>所有模块都保留统一脚本，保证可复现</a:t>
             </a:r>
           </a:p>
         </p:txBody>
@@ -8469,7 +8469,7 @@
                 </a:solidFill>
                 <a:latin typeface="Noto Sans CJK SC"/>
               </a:rPr>
-              <a:t>模块之间尽量复用同一学生架构与训练超参</a:t>
+              <a:t>模块之间尽量复用同一学生架构与超参</a:t>
             </a:r>
           </a:p>
           <a:p>
@@ -8480,7 +8480,7 @@
                 </a:solidFill>
                 <a:latin typeface="Noto Sans CJK SC"/>
               </a:rPr>
-              <a:t>通过多 seed 与大测试集缓解 83 题小样本波动</a:t>
+              <a:t>用多 seed 和大测试集缓解 83 题波动</a:t>
             </a:r>
           </a:p>
           <a:p>
@@ -8491,7 +8491,7 @@
                 </a:solidFill>
                 <a:latin typeface="Noto Sans CJK SC"/>
               </a:rPr>
-              <a:t>把理论分析放在经验结论之后，避免先验解释替代实证比较</a:t>
+              <a:t>先给经验结果，再做理论解释</a:t>
             </a:r>
           </a:p>
         </p:txBody>
@@ -9144,7 +9144,7 @@
                 </a:solidFill>
                 <a:latin typeface="Noto Sans CJK SC"/>
               </a:rPr>
-              <a:t>学生模型不只是接近教师，而是在任务结构更对齐的训练目标下可以超过教师</a:t>
+              <a:t>学生不只是接近教师，而是可以超过教师</a:t>
             </a:r>
           </a:p>
           <a:p>
@@ -9155,7 +9155,7 @@
                 </a:solidFill>
                 <a:latin typeface="Noto Sans CJK SC"/>
               </a:rPr>
-              <a:t>对 14B 强学生而言，最有效的并不一定是更复杂流程，而是更精准的蒸馏目标</a:t>
+              <a:t>关键不在流程更复杂，而在蒸馏目标更贴近任务结构</a:t>
             </a:r>
           </a:p>
           <a:p>
@@ -9166,7 +9166,7 @@
                 </a:solidFill>
                 <a:latin typeface="Noto Sans CJK SC"/>
               </a:rPr>
-              <a:t>大测试集验证后，结论在统计上更稳健，不依赖少量题目的偶然波动</a:t>
+              <a:t>991 题验证后，这个结论更稳健</a:t>
             </a:r>
           </a:p>
         </p:txBody>
@@ -9614,7 +9614,7 @@
                 </a:solidFill>
                 <a:latin typeface="Noto Sans CJK SC"/>
               </a:rPr>
-              <a:t>任务对齐优于全词表监督</a:t>
+              <a:t>任务对齐比全词表更重要</a:t>
             </a:r>
           </a:p>
         </p:txBody>
@@ -9688,7 +9688,7 @@
                 </a:solidFill>
                 <a:latin typeface="Noto Sans CJK SC"/>
               </a:rPr>
-              <a:t>7B 学生通常受益</a:t>
+              <a:t>7B 通常受益</a:t>
             </a:r>
           </a:p>
           <a:p>
@@ -9704,7 +9704,7 @@
                 </a:solidFill>
                 <a:latin typeface="Noto Sans CJK SC"/>
               </a:rPr>
-              <a:t>14B 学生均值反而下降约 1.6pp</a:t>
+              <a:t>14B 均值下降约 1.6pp</a:t>
             </a:r>
           </a:p>
           <a:p>
@@ -9720,7 +9720,7 @@
                 </a:solidFill>
                 <a:latin typeface="Noto Sans CJK SC"/>
               </a:rPr>
-              <a:t>说明强学生会被过校准</a:t>
+              <a:t>强学生可能被过校准</a:t>
             </a:r>
           </a:p>
         </p:txBody>
@@ -9794,7 +9794,7 @@
                 </a:solidFill>
                 <a:latin typeface="Noto Sans CJK SC"/>
               </a:rPr>
-              <a:t>72.8% 的 Llama-70B 教师</a:t>
+              <a:t>Llama-70B 教师：72.45%</a:t>
             </a:r>
           </a:p>
           <a:p>
@@ -9810,7 +9810,7 @@
                 </a:solidFill>
                 <a:latin typeface="Noto Sans CJK SC"/>
               </a:rPr>
-              <a:t>仍能蒸馏出 87.25% 的 14B 学生</a:t>
+              <a:t>14B 学生仍达 87.25%</a:t>
             </a:r>
           </a:p>
           <a:p>
@@ -9826,7 +9826,7 @@
                 </a:solidFill>
                 <a:latin typeface="Noto Sans CJK SC"/>
               </a:rPr>
-              <a:t>监督价值不只由教师准确率决定</a:t>
+              <a:t>教师价值不只看准确率</a:t>
             </a:r>
           </a:p>
         </p:txBody>
@@ -9880,7 +9880,7 @@
                 </a:solidFill>
                 <a:latin typeface="Noto Sans CJK SC"/>
               </a:rPr>
-              <a:t>结论不是“蒸馏越复杂越好”，而是“监督信号是否与任务决策结构匹配”。</a:t>
+              <a:t>结论不是“越复杂越好”，而是“监督信号要和任务决策结构匹配”。</a:t>
             </a:r>
           </a:p>
           <a:p>
@@ -9892,7 +9892,7 @@
                 </a:solidFill>
                 <a:latin typeface="Noto Sans CJK SC"/>
               </a:rPr>
-              <a:t>因此，本文的主要价值不只是一组更高分数，而是给出了一套可解释的设计原则：聚焦选项空间、保留教师偏好、避免无效监督维度。</a:t>
+              <a:t>本文的价值不只是一组更高分数，更在于给出了可解释的设计原则。</a:t>
             </a:r>
           </a:p>
         </p:txBody>
@@ -10210,7 +10210,7 @@
                 </a:solidFill>
                 <a:latin typeface="Noto Sans CJK SC"/>
               </a:rPr>
-              <a:t>代表：Kimi，61.45%</a:t>
+              <a:t>Kimi：62.65%</a:t>
             </a:r>
           </a:p>
           <a:p>
@@ -10226,7 +10226,7 @@
                 </a:solidFill>
                 <a:latin typeface="Noto Sans CJK SC"/>
               </a:rPr>
-              <a:t>错误过多，噪声大</a:t>
+              <a:t>分歧高但信号质量不足</a:t>
             </a:r>
           </a:p>
           <a:p>
@@ -10242,7 +10242,7 @@
                 </a:solidFill>
                 <a:latin typeface="Noto Sans CJK SC"/>
               </a:rPr>
-              <a:t>学生学习到的偏好不稳定</a:t>
+              <a:t>学生最终与基线持平</a:t>
             </a:r>
           </a:p>
         </p:txBody>
@@ -10300,7 +10300,7 @@
                 </a:solidFill>
                 <a:latin typeface="Noto Sans CJK SC"/>
               </a:rPr>
-              <a:t>最佳区间</a:t>
+              <a:t>较优情形</a:t>
             </a:r>
           </a:p>
           <a:p>
@@ -10316,7 +10316,7 @@
                 </a:solidFill>
                 <a:latin typeface="Noto Sans CJK SC"/>
               </a:rPr>
-              <a:t>教师与 GT 不一致率约 5%–15%</a:t>
+              <a:t>较高准确率 + 适度 teacher-GT 分歧</a:t>
             </a:r>
           </a:p>
           <a:p>
@@ -10332,7 +10332,7 @@
                 </a:solidFill>
                 <a:latin typeface="Noto Sans CJK SC"/>
               </a:rPr>
-              <a:t>既保留结构信息，又不过度偏离真值</a:t>
+              <a:t>保留结构信息，又不过分偏离真值</a:t>
             </a:r>
           </a:p>
           <a:p>
@@ -10348,7 +10348,7 @@
                 </a:solidFill>
                 <a:latin typeface="Noto Sans CJK SC"/>
               </a:rPr>
-              <a:t>是最适合迁移的蒸馏信号</a:t>
+              <a:t>更容易带来蒸馏增益</a:t>
             </a:r>
           </a:p>
         </p:txBody>
@@ -10454,7 +10454,7 @@
                 </a:solidFill>
                 <a:latin typeface="Noto Sans CJK SC"/>
               </a:rPr>
-              <a:t>难以提供有梯度价值的混淆结构</a:t>
+              <a:t>给不出有效混淆结构</a:t>
             </a:r>
           </a:p>
         </p:txBody>
@@ -10508,7 +10508,7 @@
                 </a:solidFill>
                 <a:latin typeface="Noto Sans CJK SC"/>
               </a:rPr>
-              <a:t>教师质量与蒸馏收益呈倒 U 型关系。真正关键的不是教师“绝对有多强”，而是它是否保留了可迁移的结构性不确定性。</a:t>
+              <a:t>教师质量与蒸馏收益呈倒 U 型，关键在于是否保留了可迁移的不确定性结构。</a:t>
             </a:r>
           </a:p>
         </p:txBody>
